--- a/HackMatrix_presentation.pptx
+++ b/HackMatrix_presentation.pptx
@@ -152,6 +152,35 @@
     </p:ext>
   </p:extLst>
 </p:presentation>
+</file>
+
+<file path=ppt/changesInfos/changesInfo1.xml><?xml version="1.0" encoding="utf-8"?>
+<pc:chgInfo xmlns:a="http://schemas.openxmlformats.org/drawingml/2006/main" xmlns:r="http://schemas.openxmlformats.org/officeDocument/2006/relationships" xmlns:ac="http://schemas.microsoft.com/office/drawing/2013/main/command" xmlns:pc="http://schemas.microsoft.com/office/powerpoint/2013/main/command">
+  <pc:docChgLst>
+    <pc:chgData name="Karnika Periyasamy" userId="5312d1e666e0d3df" providerId="LiveId" clId="{5AE3D8CD-F316-4ECB-96CE-C698D97D6446}"/>
+    <pc:docChg chg="modSld">
+      <pc:chgData name="Karnika Periyasamy" userId="5312d1e666e0d3df" providerId="LiveId" clId="{5AE3D8CD-F316-4ECB-96CE-C698D97D6446}" dt="2026-08-10T01:46:12.430" v="19" actId="20577"/>
+      <pc:docMkLst>
+        <pc:docMk/>
+      </pc:docMkLst>
+      <pc:sldChg chg="modSp mod">
+        <pc:chgData name="Karnika Periyasamy" userId="5312d1e666e0d3df" providerId="LiveId" clId="{5AE3D8CD-F316-4ECB-96CE-C698D97D6446}" dt="2026-08-10T01:46:12.430" v="19" actId="20577"/>
+        <pc:sldMkLst>
+          <pc:docMk/>
+          <pc:sldMk cId="0" sldId="256"/>
+        </pc:sldMkLst>
+        <pc:spChg chg="mod">
+          <ac:chgData name="Karnika Periyasamy" userId="5312d1e666e0d3df" providerId="LiveId" clId="{5AE3D8CD-F316-4ECB-96CE-C698D97D6446}" dt="2026-08-10T01:46:12.430" v="19" actId="20577"/>
+          <ac:spMkLst>
+            <pc:docMk/>
+            <pc:sldMk cId="0" sldId="256"/>
+            <ac:spMk id="5" creationId="{00000000-0000-0000-0000-000000000000}"/>
+          </ac:spMkLst>
+        </pc:spChg>
+      </pc:sldChg>
+    </pc:docChg>
+  </pc:docChgLst>
+</pc:chgInfo>
 </file>
 
 <file path=ppt/slideLayouts/slideLayout1.xml><?xml version="1.0" encoding="utf-8"?>
@@ -3252,7 +3281,7 @@
         <p:spPr>
           <a:xfrm>
             <a:off x="2719595" y="3617019"/>
-            <a:ext cx="7096488" cy="3193631"/>
+            <a:ext cx="7096488" cy="3732240"/>
           </a:xfrm>
           <a:prstGeom prst="rect">
             <a:avLst/>
@@ -3277,16 +3306,25 @@
                 <a:latin typeface="Helvetica World"/>
               </a:rPr>
               <a:t>
-</a:t>
-            </a:r>
-            <a:r>
-              <a:rPr sz="3000" dirty="0" err="1">
-                <a:solidFill>
-                  <a:srgbClr val="98C632"/>
-                </a:solidFill>
-                <a:latin typeface="Helvetica World"/>
-              </a:rPr>
-              <a:t>Domain:Network</a:t>
+Domain:</a:t>
+            </a:r>
+            <a:r>
+              <a:rPr lang="en-GB" sz="3000">
+                <a:solidFill>
+                  <a:srgbClr val="98C632"/>
+                </a:solidFill>
+                <a:latin typeface="Helvetica World"/>
+              </a:rPr>
+              <a:t>Web Development/</a:t>
+            </a:r>
+            <a:r>
+              <a:rPr sz="3000">
+                <a:solidFill>
+                  <a:srgbClr val="98C632"/>
+                </a:solidFill>
+                <a:latin typeface="Helvetica World"/>
+              </a:rPr>
+              <a:t>Network </a:t>
             </a:r>
             <a:r>
               <a:rPr sz="3000" dirty="0">
@@ -3295,7 +3333,7 @@
                 </a:solidFill>
                 <a:latin typeface="Helvetica World"/>
               </a:rPr>
-              <a:t> Security
+              <a:t>Security
 Team </a:t>
             </a:r>
             <a:r>

--- a/HackMatrix_presentation.pptx
+++ b/HackMatrix_presentation.pptx
@@ -159,18 +159,34 @@
   <pc:docChgLst>
     <pc:chgData name="Karnika Periyasamy" userId="5312d1e666e0d3df" providerId="LiveId" clId="{5AE3D8CD-F316-4ECB-96CE-C698D97D6446}"/>
     <pc:docChg chg="modSld">
-      <pc:chgData name="Karnika Periyasamy" userId="5312d1e666e0d3df" providerId="LiveId" clId="{5AE3D8CD-F316-4ECB-96CE-C698D97D6446}" dt="2026-08-10T01:46:12.430" v="19" actId="20577"/>
+      <pc:chgData name="Karnika Periyasamy" userId="5312d1e666e0d3df" providerId="LiveId" clId="{5AE3D8CD-F316-4ECB-96CE-C698D97D6446}" dt="2026-08-10T05:52:15.318" v="28" actId="20577"/>
       <pc:docMkLst>
         <pc:docMk/>
       </pc:docMkLst>
       <pc:sldChg chg="modSp mod">
-        <pc:chgData name="Karnika Periyasamy" userId="5312d1e666e0d3df" providerId="LiveId" clId="{5AE3D8CD-F316-4ECB-96CE-C698D97D6446}" dt="2026-08-10T01:46:12.430" v="19" actId="20577"/>
+        <pc:chgData name="Karnika Periyasamy" userId="5312d1e666e0d3df" providerId="LiveId" clId="{5AE3D8CD-F316-4ECB-96CE-C698D97D6446}" dt="2026-08-10T05:52:15.318" v="28" actId="20577"/>
         <pc:sldMkLst>
           <pc:docMk/>
           <pc:sldMk cId="0" sldId="256"/>
         </pc:sldMkLst>
         <pc:spChg chg="mod">
-          <ac:chgData name="Karnika Periyasamy" userId="5312d1e666e0d3df" providerId="LiveId" clId="{5AE3D8CD-F316-4ECB-96CE-C698D97D6446}" dt="2026-08-10T01:46:12.430" v="19" actId="20577"/>
+          <ac:chgData name="Karnika Periyasamy" userId="5312d1e666e0d3df" providerId="LiveId" clId="{5AE3D8CD-F316-4ECB-96CE-C698D97D6446}" dt="2026-08-10T05:51:59.617" v="26" actId="1076"/>
+          <ac:spMkLst>
+            <pc:docMk/>
+            <pc:sldMk cId="0" sldId="256"/>
+            <ac:spMk id="2" creationId="{00000000-0000-0000-0000-000000000000}"/>
+          </ac:spMkLst>
+        </pc:spChg>
+        <pc:spChg chg="mod">
+          <ac:chgData name="Karnika Periyasamy" userId="5312d1e666e0d3df" providerId="LiveId" clId="{5AE3D8CD-F316-4ECB-96CE-C698D97D6446}" dt="2026-08-10T05:51:21.290" v="22" actId="1076"/>
+          <ac:spMkLst>
+            <pc:docMk/>
+            <pc:sldMk cId="0" sldId="256"/>
+            <ac:spMk id="4" creationId="{00000000-0000-0000-0000-000000000000}"/>
+          </ac:spMkLst>
+        </pc:spChg>
+        <pc:spChg chg="mod">
+          <ac:chgData name="Karnika Periyasamy" userId="5312d1e666e0d3df" providerId="LiveId" clId="{5AE3D8CD-F316-4ECB-96CE-C698D97D6446}" dt="2026-08-10T05:52:15.318" v="28" actId="20577"/>
           <ac:spMkLst>
             <pc:docMk/>
             <pc:sldMk cId="0" sldId="256"/>
@@ -3122,7 +3138,7 @@
         </p:nvSpPr>
         <p:spPr>
           <a:xfrm>
-            <a:off x="0" y="0"/>
+            <a:off x="-14868" y="2788"/>
             <a:ext cx="18288000" cy="10287000"/>
           </a:xfrm>
           <a:custGeom>
@@ -3238,7 +3254,7 @@
         </p:nvSpPr>
         <p:spPr>
           <a:xfrm>
-            <a:off x="2194560" y="1143000"/>
+            <a:off x="2719595" y="1153222"/>
             <a:ext cx="10058400" cy="1380571"/>
           </a:xfrm>
           <a:prstGeom prst="rect">
@@ -3281,7 +3297,7 @@
         <p:spPr>
           <a:xfrm>
             <a:off x="2719595" y="3617019"/>
-            <a:ext cx="7096488" cy="3732240"/>
+            <a:ext cx="7096488" cy="6740307"/>
           </a:xfrm>
           <a:prstGeom prst="rect">
             <a:avLst/>
@@ -3293,11 +3309,40 @@
           </a:bodyPr>
           <a:lstStyle/>
           <a:p>
-            <a:pPr algn="l">
-              <a:lnSpc>
-                <a:spcPts val="4200"/>
-              </a:lnSpc>
-            </a:pPr>
+            <a:r>
+              <a:rPr lang="en-GB" sz="3200" b="1" dirty="0">
+                <a:solidFill>
+                  <a:srgbClr val="92D050"/>
+                </a:solidFill>
+              </a:rPr>
+              <a:t>Problem Statement</a:t>
+            </a:r>
+          </a:p>
+          <a:p>
+            <a:r>
+              <a:rPr lang="en-GB" sz="3200" dirty="0">
+                <a:solidFill>
+                  <a:srgbClr val="92D050"/>
+                </a:solidFill>
+              </a:rPr>
+              <a:t>Manual network monitoring and topology creation are time-consuming, error-prone, and make security threats difficult to detect. </a:t>
+            </a:r>
+            <a:r>
+              <a:rPr lang="en-GB" sz="3200" b="1" dirty="0">
+                <a:solidFill>
+                  <a:srgbClr val="92D050"/>
+                </a:solidFill>
+              </a:rPr>
+              <a:t>SANTMS</a:t>
+            </a:r>
+            <a:r>
+              <a:rPr lang="en-GB" sz="3200" dirty="0">
+                <a:solidFill>
+                  <a:srgbClr val="92D050"/>
+                </a:solidFill>
+              </a:rPr>
+              <a:t> automatically discovers devices, generates network topology, monitors network health, and identifies security risks through a centralized management system.</a:t>
+            </a:r>
             <a:r>
               <a:rPr sz="3000" dirty="0">
                 <a:solidFill>
@@ -3309,7 +3354,7 @@
 Domain:</a:t>
             </a:r>
             <a:r>
-              <a:rPr lang="en-GB" sz="3000">
+              <a:rPr lang="en-GB" sz="3000" dirty="0">
                 <a:solidFill>
                   <a:srgbClr val="98C632"/>
                 </a:solidFill>
@@ -3318,22 +3363,13 @@
               <a:t>Web Development/</a:t>
             </a:r>
             <a:r>
-              <a:rPr sz="3000">
-                <a:solidFill>
-                  <a:srgbClr val="98C632"/>
-                </a:solidFill>
-                <a:latin typeface="Helvetica World"/>
-              </a:rPr>
-              <a:t>Network </a:t>
-            </a:r>
-            <a:r>
               <a:rPr sz="3000" dirty="0">
                 <a:solidFill>
                   <a:srgbClr val="98C632"/>
                 </a:solidFill>
                 <a:latin typeface="Helvetica World"/>
               </a:rPr>
-              <a:t>Security
+              <a:t>Network Security
 Team </a:t>
             </a:r>
             <a:r>
